--- a/palak kotwani presentation UPODATED.pptx
+++ b/palak kotwani presentation UPODATED.pptx
@@ -144,20 +144,12 @@
 </p:presentation>
 </file>
 
-<file path=ppt/revisionInfo.xml><?xml version="1.0" encoding="utf-8"?>
-<p1510:revInfo xmlns:a="http://schemas.openxmlformats.org/drawingml/2006/main" xmlns:r="http://schemas.openxmlformats.org/officeDocument/2006/relationships" xmlns:p1510="http://schemas.microsoft.com/office/powerpoint/2015/10/main">
-  <p1510:revLst>
-    <p1510:client id="{95C2777B-8DA3-4670-8221-301321E04D41}" v="13" dt="2026-04-10T15:57:36.847"/>
-  </p1510:revLst>
-</p1510:revInfo>
-</file>
-
 <file path=ppt/changesInfos/changesInfo1.xml><?xml version="1.0" encoding="utf-8"?>
 <pc:chgInfo xmlns:a="http://schemas.openxmlformats.org/drawingml/2006/main" xmlns:r="http://schemas.openxmlformats.org/officeDocument/2006/relationships" xmlns:ac="http://schemas.microsoft.com/office/drawing/2013/main/command" xmlns:pc="http://schemas.microsoft.com/office/powerpoint/2013/main/command">
   <pc:docChgLst>
     <pc:chgData name="Heena Kotwani" userId="3b6fb2d240f53904" providerId="LiveId" clId="{188CB08A-E54E-40AB-9833-847A6B555ACB}"/>
-    <pc:docChg chg="undo custSel modSld">
-      <pc:chgData name="Heena Kotwani" userId="3b6fb2d240f53904" providerId="LiveId" clId="{188CB08A-E54E-40AB-9833-847A6B555ACB}" dt="2026-04-10T16:04:21.703" v="149" actId="5793"/>
+    <pc:docChg chg="undo custSel modSld sldOrd">
+      <pc:chgData name="Heena Kotwani" userId="3b6fb2d240f53904" providerId="LiveId" clId="{188CB08A-E54E-40AB-9833-847A6B555ACB}" dt="2026-04-13T12:36:08.331" v="153"/>
       <pc:docMkLst>
         <pc:docMk/>
       </pc:docMkLst>
@@ -175,45 +167,13 @@
             <ac:spMk id="24" creationId="{90865657-EE51-429D-40B6-B64C80E4AB47}"/>
           </ac:spMkLst>
         </pc:spChg>
-        <pc:picChg chg="add del mod">
-          <ac:chgData name="Heena Kotwani" userId="3b6fb2d240f53904" providerId="LiveId" clId="{188CB08A-E54E-40AB-9833-847A6B555ACB}" dt="2026-04-10T14:38:50.240" v="12"/>
-          <ac:picMkLst>
-            <pc:docMk/>
-            <pc:sldMk cId="0" sldId="257"/>
-            <ac:picMk id="2" creationId="{5E121517-D571-5FCB-B234-55357D695492}"/>
-          </ac:picMkLst>
-        </pc:picChg>
-        <pc:picChg chg="add del mod">
-          <ac:chgData name="Heena Kotwani" userId="3b6fb2d240f53904" providerId="LiveId" clId="{188CB08A-E54E-40AB-9833-847A6B555ACB}" dt="2026-04-10T14:44:14.307" v="14" actId="21"/>
-          <ac:picMkLst>
-            <pc:docMk/>
-            <pc:sldMk cId="0" sldId="257"/>
-            <ac:picMk id="3" creationId="{D817E040-5EDB-43F1-E803-AF22C4ABF50D}"/>
-          </ac:picMkLst>
-        </pc:picChg>
       </pc:sldChg>
-      <pc:sldChg chg="addSp delSp modSp mod modTransition delAnim">
-        <pc:chgData name="Heena Kotwani" userId="3b6fb2d240f53904" providerId="LiveId" clId="{188CB08A-E54E-40AB-9833-847A6B555ACB}" dt="2026-04-10T15:57:36.847" v="64"/>
+      <pc:sldChg chg="addSp delSp modSp mod ord modTransition delAnim">
+        <pc:chgData name="Heena Kotwani" userId="3b6fb2d240f53904" providerId="LiveId" clId="{188CB08A-E54E-40AB-9833-847A6B555ACB}" dt="2026-04-13T12:36:08.331" v="153"/>
         <pc:sldMkLst>
           <pc:docMk/>
           <pc:sldMk cId="0" sldId="258"/>
         </pc:sldMkLst>
-        <pc:picChg chg="add del mod">
-          <ac:chgData name="Heena Kotwani" userId="3b6fb2d240f53904" providerId="LiveId" clId="{188CB08A-E54E-40AB-9833-847A6B555ACB}" dt="2026-04-10T14:38:50.240" v="12"/>
-          <ac:picMkLst>
-            <pc:docMk/>
-            <pc:sldMk cId="0" sldId="258"/>
-            <ac:picMk id="3" creationId="{1FB3E0D6-2FBD-D4FB-2772-5CC0FA199492}"/>
-          </ac:picMkLst>
-        </pc:picChg>
-        <pc:picChg chg="add del mod">
-          <ac:chgData name="Heena Kotwani" userId="3b6fb2d240f53904" providerId="LiveId" clId="{188CB08A-E54E-40AB-9833-847A6B555ACB}" dt="2026-04-10T14:44:18.299" v="15" actId="21"/>
-          <ac:picMkLst>
-            <pc:docMk/>
-            <pc:sldMk cId="0" sldId="258"/>
-            <ac:picMk id="5" creationId="{A51BD182-0F55-B6BC-C993-5036C1FAC4A1}"/>
-          </ac:picMkLst>
-        </pc:picChg>
       </pc:sldChg>
       <pc:sldChg chg="addSp delSp modSp mod modTransition delAnim">
         <pc:chgData name="Heena Kotwani" userId="3b6fb2d240f53904" providerId="LiveId" clId="{188CB08A-E54E-40AB-9833-847A6B555ACB}" dt="2026-04-10T15:57:36.847" v="64"/>
@@ -221,22 +181,6 @@
           <pc:docMk/>
           <pc:sldMk cId="0" sldId="259"/>
         </pc:sldMkLst>
-        <pc:picChg chg="add del mod">
-          <ac:chgData name="Heena Kotwani" userId="3b6fb2d240f53904" providerId="LiveId" clId="{188CB08A-E54E-40AB-9833-847A6B555ACB}" dt="2026-04-10T14:38:50.240" v="12"/>
-          <ac:picMkLst>
-            <pc:docMk/>
-            <pc:sldMk cId="0" sldId="259"/>
-            <ac:picMk id="2" creationId="{B101CC7C-6D1D-6F5E-143D-A895A8BC1A88}"/>
-          </ac:picMkLst>
-        </pc:picChg>
-        <pc:picChg chg="add del mod">
-          <ac:chgData name="Heena Kotwani" userId="3b6fb2d240f53904" providerId="LiveId" clId="{188CB08A-E54E-40AB-9833-847A6B555ACB}" dt="2026-04-10T14:44:25.439" v="16" actId="21"/>
-          <ac:picMkLst>
-            <pc:docMk/>
-            <pc:sldMk cId="0" sldId="259"/>
-            <ac:picMk id="5" creationId="{F5F785C0-3751-E811-35CB-1FC069620006}"/>
-          </ac:picMkLst>
-        </pc:picChg>
       </pc:sldChg>
       <pc:sldChg chg="addSp delSp modSp mod modTransition delAnim">
         <pc:chgData name="Heena Kotwani" userId="3b6fb2d240f53904" providerId="LiveId" clId="{188CB08A-E54E-40AB-9833-847A6B555ACB}" dt="2026-04-10T15:57:36.847" v="64"/>
@@ -244,22 +188,6 @@
           <pc:docMk/>
           <pc:sldMk cId="0" sldId="260"/>
         </pc:sldMkLst>
-        <pc:picChg chg="add del mod">
-          <ac:chgData name="Heena Kotwani" userId="3b6fb2d240f53904" providerId="LiveId" clId="{188CB08A-E54E-40AB-9833-847A6B555ACB}" dt="2026-04-10T14:38:50.240" v="12"/>
-          <ac:picMkLst>
-            <pc:docMk/>
-            <pc:sldMk cId="0" sldId="260"/>
-            <ac:picMk id="2" creationId="{F22CA966-16B6-B6CA-77DE-B98DA4B1925C}"/>
-          </ac:picMkLst>
-        </pc:picChg>
-        <pc:picChg chg="add del mod">
-          <ac:chgData name="Heena Kotwani" userId="3b6fb2d240f53904" providerId="LiveId" clId="{188CB08A-E54E-40AB-9833-847A6B555ACB}" dt="2026-04-10T14:44:30.275" v="17" actId="21"/>
-          <ac:picMkLst>
-            <pc:docMk/>
-            <pc:sldMk cId="0" sldId="260"/>
-            <ac:picMk id="3" creationId="{DE80C967-0AA4-824F-25C1-F2C5E86D070C}"/>
-          </ac:picMkLst>
-        </pc:picChg>
       </pc:sldChg>
       <pc:sldChg chg="addSp delSp modSp mod modTransition delAnim">
         <pc:chgData name="Heena Kotwani" userId="3b6fb2d240f53904" providerId="LiveId" clId="{188CB08A-E54E-40AB-9833-847A6B555ACB}" dt="2026-04-10T15:57:36.847" v="64"/>
@@ -267,22 +195,6 @@
           <pc:docMk/>
           <pc:sldMk cId="0" sldId="261"/>
         </pc:sldMkLst>
-        <pc:picChg chg="add del mod">
-          <ac:chgData name="Heena Kotwani" userId="3b6fb2d240f53904" providerId="LiveId" clId="{188CB08A-E54E-40AB-9833-847A6B555ACB}" dt="2026-04-10T14:38:50.240" v="12"/>
-          <ac:picMkLst>
-            <pc:docMk/>
-            <pc:sldMk cId="0" sldId="261"/>
-            <ac:picMk id="2" creationId="{137CDB8D-9D39-82E3-030E-AF5D97AD6178}"/>
-          </ac:picMkLst>
-        </pc:picChg>
-        <pc:picChg chg="add del mod">
-          <ac:chgData name="Heena Kotwani" userId="3b6fb2d240f53904" providerId="LiveId" clId="{188CB08A-E54E-40AB-9833-847A6B555ACB}" dt="2026-04-10T14:44:55.721" v="18" actId="21"/>
-          <ac:picMkLst>
-            <pc:docMk/>
-            <pc:sldMk cId="0" sldId="261"/>
-            <ac:picMk id="3" creationId="{1F4438AA-3ADB-FBB2-D10F-EF40B5EF2298}"/>
-          </ac:picMkLst>
-        </pc:picChg>
       </pc:sldChg>
       <pc:sldChg chg="addSp delSp modSp mod modTransition delAnim">
         <pc:chgData name="Heena Kotwani" userId="3b6fb2d240f53904" providerId="LiveId" clId="{188CB08A-E54E-40AB-9833-847A6B555ACB}" dt="2026-04-10T15:57:36.847" v="64"/>
@@ -290,22 +202,6 @@
           <pc:docMk/>
           <pc:sldMk cId="0" sldId="262"/>
         </pc:sldMkLst>
-        <pc:picChg chg="add del mod">
-          <ac:chgData name="Heena Kotwani" userId="3b6fb2d240f53904" providerId="LiveId" clId="{188CB08A-E54E-40AB-9833-847A6B555ACB}" dt="2026-04-10T14:38:50.240" v="12"/>
-          <ac:picMkLst>
-            <pc:docMk/>
-            <pc:sldMk cId="0" sldId="262"/>
-            <ac:picMk id="2" creationId="{A79AA981-33B7-65BD-3A83-9C5F29A4E8F4}"/>
-          </ac:picMkLst>
-        </pc:picChg>
-        <pc:picChg chg="add del mod">
-          <ac:chgData name="Heena Kotwani" userId="3b6fb2d240f53904" providerId="LiveId" clId="{188CB08A-E54E-40AB-9833-847A6B555ACB}" dt="2026-04-10T14:44:59.999" v="19" actId="21"/>
-          <ac:picMkLst>
-            <pc:docMk/>
-            <pc:sldMk cId="0" sldId="262"/>
-            <ac:picMk id="3" creationId="{38BBDA56-10EC-5FD3-4223-EE1A3BE41254}"/>
-          </ac:picMkLst>
-        </pc:picChg>
       </pc:sldChg>
       <pc:sldChg chg="addSp delSp modSp modTransition">
         <pc:chgData name="Heena Kotwani" userId="3b6fb2d240f53904" providerId="LiveId" clId="{188CB08A-E54E-40AB-9833-847A6B555ACB}" dt="2026-04-10T15:57:36.847" v="64"/>
@@ -313,14 +209,6 @@
           <pc:docMk/>
           <pc:sldMk cId="0" sldId="263"/>
         </pc:sldMkLst>
-        <pc:picChg chg="add del mod">
-          <ac:chgData name="Heena Kotwani" userId="3b6fb2d240f53904" providerId="LiveId" clId="{188CB08A-E54E-40AB-9833-847A6B555ACB}" dt="2026-04-10T14:38:50.240" v="12"/>
-          <ac:picMkLst>
-            <pc:docMk/>
-            <pc:sldMk cId="0" sldId="263"/>
-            <ac:picMk id="2" creationId="{25966C9F-C467-82AA-F2A9-7E53D1031C62}"/>
-          </ac:picMkLst>
-        </pc:picChg>
       </pc:sldChg>
       <pc:sldChg chg="addSp delSp modSp mod modTransition delAnim">
         <pc:chgData name="Heena Kotwani" userId="3b6fb2d240f53904" providerId="LiveId" clId="{188CB08A-E54E-40AB-9833-847A6B555ACB}" dt="2026-04-10T15:57:36.847" v="64"/>
@@ -328,22 +216,6 @@
           <pc:docMk/>
           <pc:sldMk cId="0" sldId="264"/>
         </pc:sldMkLst>
-        <pc:picChg chg="add del mod">
-          <ac:chgData name="Heena Kotwani" userId="3b6fb2d240f53904" providerId="LiveId" clId="{188CB08A-E54E-40AB-9833-847A6B555ACB}" dt="2026-04-10T14:38:50.240" v="12"/>
-          <ac:picMkLst>
-            <pc:docMk/>
-            <pc:sldMk cId="0" sldId="264"/>
-            <ac:picMk id="2" creationId="{976D20D4-7E47-1DA2-70FF-2629AA8A9A96}"/>
-          </ac:picMkLst>
-        </pc:picChg>
-        <pc:picChg chg="add del mod">
-          <ac:chgData name="Heena Kotwani" userId="3b6fb2d240f53904" providerId="LiveId" clId="{188CB08A-E54E-40AB-9833-847A6B555ACB}" dt="2026-04-10T14:45:21.556" v="22" actId="21"/>
-          <ac:picMkLst>
-            <pc:docMk/>
-            <pc:sldMk cId="0" sldId="264"/>
-            <ac:picMk id="3" creationId="{6D93D268-56AB-903C-0583-EE77B8862688}"/>
-          </ac:picMkLst>
-        </pc:picChg>
       </pc:sldChg>
       <pc:sldChg chg="addSp delSp modSp mod modTransition delAnim">
         <pc:chgData name="Heena Kotwani" userId="3b6fb2d240f53904" providerId="LiveId" clId="{188CB08A-E54E-40AB-9833-847A6B555ACB}" dt="2026-04-10T15:57:36.847" v="64"/>
@@ -351,22 +223,6 @@
           <pc:docMk/>
           <pc:sldMk cId="0" sldId="265"/>
         </pc:sldMkLst>
-        <pc:picChg chg="add del mod">
-          <ac:chgData name="Heena Kotwani" userId="3b6fb2d240f53904" providerId="LiveId" clId="{188CB08A-E54E-40AB-9833-847A6B555ACB}" dt="2026-04-10T14:38:50.240" v="12"/>
-          <ac:picMkLst>
-            <pc:docMk/>
-            <pc:sldMk cId="0" sldId="265"/>
-            <ac:picMk id="3" creationId="{3E661D19-C111-EFA2-E7A0-B7532923EB73}"/>
-          </ac:picMkLst>
-        </pc:picChg>
-        <pc:picChg chg="add del mod">
-          <ac:chgData name="Heena Kotwani" userId="3b6fb2d240f53904" providerId="LiveId" clId="{188CB08A-E54E-40AB-9833-847A6B555ACB}" dt="2026-04-10T14:45:26.407" v="23" actId="21"/>
-          <ac:picMkLst>
-            <pc:docMk/>
-            <pc:sldMk cId="0" sldId="265"/>
-            <ac:picMk id="5" creationId="{EEC282F2-FEBA-8BD6-90F5-765C311F181C}"/>
-          </ac:picMkLst>
-        </pc:picChg>
       </pc:sldChg>
       <pc:sldChg chg="addSp delSp modSp mod modTransition delAnim">
         <pc:chgData name="Heena Kotwani" userId="3b6fb2d240f53904" providerId="LiveId" clId="{188CB08A-E54E-40AB-9833-847A6B555ACB}" dt="2026-04-10T15:57:36.847" v="64"/>
@@ -374,22 +230,6 @@
           <pc:docMk/>
           <pc:sldMk cId="0" sldId="266"/>
         </pc:sldMkLst>
-        <pc:picChg chg="add del mod">
-          <ac:chgData name="Heena Kotwani" userId="3b6fb2d240f53904" providerId="LiveId" clId="{188CB08A-E54E-40AB-9833-847A6B555ACB}" dt="2026-04-10T14:38:50.240" v="12"/>
-          <ac:picMkLst>
-            <pc:docMk/>
-            <pc:sldMk cId="0" sldId="266"/>
-            <ac:picMk id="2" creationId="{7D064845-B67C-931C-1EC5-2E6065F75CA9}"/>
-          </ac:picMkLst>
-        </pc:picChg>
-        <pc:picChg chg="add del mod">
-          <ac:chgData name="Heena Kotwani" userId="3b6fb2d240f53904" providerId="LiveId" clId="{188CB08A-E54E-40AB-9833-847A6B555ACB}" dt="2026-04-10T14:45:38.018" v="25" actId="21"/>
-          <ac:picMkLst>
-            <pc:docMk/>
-            <pc:sldMk cId="0" sldId="266"/>
-            <ac:picMk id="3" creationId="{D86516F6-1CB9-A5EB-5F3E-565EF4F674BB}"/>
-          </ac:picMkLst>
-        </pc:picChg>
       </pc:sldChg>
       <pc:sldChg chg="addSp delSp modSp mod modTransition delAnim modAnim">
         <pc:chgData name="Heena Kotwani" userId="3b6fb2d240f53904" providerId="LiveId" clId="{188CB08A-E54E-40AB-9833-847A6B555ACB}" dt="2026-04-10T15:57:36.847" v="64"/>
@@ -405,28 +245,12 @@
             <ac:grpSpMk id="23" creationId="{2ABF0622-9241-CD75-6B4F-4578A248FF9B}"/>
           </ac:grpSpMkLst>
         </pc:grpChg>
-        <pc:picChg chg="add del mod">
-          <ac:chgData name="Heena Kotwani" userId="3b6fb2d240f53904" providerId="LiveId" clId="{188CB08A-E54E-40AB-9833-847A6B555ACB}" dt="2026-04-10T14:38:50.240" v="12"/>
-          <ac:picMkLst>
-            <pc:docMk/>
-            <pc:sldMk cId="121223606" sldId="268"/>
-            <ac:picMk id="26" creationId="{16B3F561-C264-0278-2518-28698B5AB862}"/>
-          </ac:picMkLst>
-        </pc:picChg>
         <pc:picChg chg="add mod">
           <ac:chgData name="Heena Kotwani" userId="3b6fb2d240f53904" providerId="LiveId" clId="{188CB08A-E54E-40AB-9833-847A6B555ACB}" dt="2026-04-10T15:49:49.216" v="58"/>
           <ac:picMkLst>
             <pc:docMk/>
             <pc:sldMk cId="121223606" sldId="268"/>
             <ac:picMk id="26" creationId="{BAC847B7-81BA-28A5-EA9A-9A183AF66068}"/>
-          </ac:picMkLst>
-        </pc:picChg>
-        <pc:picChg chg="add del mod">
-          <ac:chgData name="Heena Kotwani" userId="3b6fb2d240f53904" providerId="LiveId" clId="{188CB08A-E54E-40AB-9833-847A6B555ACB}" dt="2026-04-10T14:44:05.834" v="13" actId="21"/>
-          <ac:picMkLst>
-            <pc:docMk/>
-            <pc:sldMk cId="121223606" sldId="268"/>
-            <ac:picMk id="27" creationId="{5A065DCC-CBD3-9C6D-6DE2-9D3A2E22E1BC}"/>
           </ac:picMkLst>
         </pc:picChg>
       </pc:sldChg>
@@ -436,22 +260,6 @@
           <pc:docMk/>
           <pc:sldMk cId="2800523426" sldId="271"/>
         </pc:sldMkLst>
-        <pc:picChg chg="add del mod">
-          <ac:chgData name="Heena Kotwani" userId="3b6fb2d240f53904" providerId="LiveId" clId="{188CB08A-E54E-40AB-9833-847A6B555ACB}" dt="2026-04-10T14:38:50.240" v="12"/>
-          <ac:picMkLst>
-            <pc:docMk/>
-            <pc:sldMk cId="2800523426" sldId="271"/>
-            <ac:picMk id="2" creationId="{AD90DD25-0D7D-6693-08B6-0C6F04BDA516}"/>
-          </ac:picMkLst>
-        </pc:picChg>
-        <pc:picChg chg="add del mod">
-          <ac:chgData name="Heena Kotwani" userId="3b6fb2d240f53904" providerId="LiveId" clId="{188CB08A-E54E-40AB-9833-847A6B555ACB}" dt="2026-04-10T14:45:33.166" v="24" actId="21"/>
-          <ac:picMkLst>
-            <pc:docMk/>
-            <pc:sldMk cId="2800523426" sldId="271"/>
-            <ac:picMk id="3" creationId="{D965D6A5-ED4D-DC61-8F49-747F11B15983}"/>
-          </ac:picMkLst>
-        </pc:picChg>
       </pc:sldChg>
       <pc:sldChg chg="addSp delSp modSp mod modTransition delAnim">
         <pc:chgData name="Heena Kotwani" userId="3b6fb2d240f53904" providerId="LiveId" clId="{188CB08A-E54E-40AB-9833-847A6B555ACB}" dt="2026-04-10T16:01:05.924" v="121" actId="1076"/>
@@ -467,22 +275,6 @@
             <ac:spMk id="4" creationId="{4ECF7404-4F47-9581-29BD-C3F824836D00}"/>
           </ac:spMkLst>
         </pc:spChg>
-        <pc:picChg chg="add del mod">
-          <ac:chgData name="Heena Kotwani" userId="3b6fb2d240f53904" providerId="LiveId" clId="{188CB08A-E54E-40AB-9833-847A6B555ACB}" dt="2026-04-10T14:38:50.240" v="12"/>
-          <ac:picMkLst>
-            <pc:docMk/>
-            <pc:sldMk cId="4014669509" sldId="272"/>
-            <ac:picMk id="3" creationId="{F84B93F4-9878-8184-7D95-57FCF84C3240}"/>
-          </ac:picMkLst>
-        </pc:picChg>
-        <pc:picChg chg="add del mod">
-          <ac:chgData name="Heena Kotwani" userId="3b6fb2d240f53904" providerId="LiveId" clId="{188CB08A-E54E-40AB-9833-847A6B555ACB}" dt="2026-04-10T14:45:04.750" v="20" actId="21"/>
-          <ac:picMkLst>
-            <pc:docMk/>
-            <pc:sldMk cId="4014669509" sldId="272"/>
-            <ac:picMk id="5" creationId="{846680A6-377F-B97B-6988-A2FA91391C0C}"/>
-          </ac:picMkLst>
-        </pc:picChg>
       </pc:sldChg>
       <pc:sldChg chg="addSp delSp modSp mod modTransition delAnim">
         <pc:chgData name="Heena Kotwani" userId="3b6fb2d240f53904" providerId="LiveId" clId="{188CB08A-E54E-40AB-9833-847A6B555ACB}" dt="2026-04-10T15:57:36.847" v="64"/>
@@ -498,22 +290,6 @@
             <ac:spMk id="4" creationId="{3554F185-99A6-F6AA-B1E9-147493E40230}"/>
           </ac:spMkLst>
         </pc:spChg>
-        <pc:picChg chg="add del mod">
-          <ac:chgData name="Heena Kotwani" userId="3b6fb2d240f53904" providerId="LiveId" clId="{188CB08A-E54E-40AB-9833-847A6B555ACB}" dt="2026-04-10T14:38:50.240" v="12"/>
-          <ac:picMkLst>
-            <pc:docMk/>
-            <pc:sldMk cId="2671150582" sldId="273"/>
-            <ac:picMk id="2" creationId="{C18B4C4C-835A-78A8-A9B3-CC10304F2948}"/>
-          </ac:picMkLst>
-        </pc:picChg>
-        <pc:picChg chg="add del mod">
-          <ac:chgData name="Heena Kotwani" userId="3b6fb2d240f53904" providerId="LiveId" clId="{188CB08A-E54E-40AB-9833-847A6B555ACB}" dt="2026-04-10T14:45:16.254" v="21" actId="21"/>
-          <ac:picMkLst>
-            <pc:docMk/>
-            <pc:sldMk cId="2671150582" sldId="273"/>
-            <ac:picMk id="5" creationId="{3F67CD29-0340-4F4A-97CE-4C8C92E6E5C4}"/>
-          </ac:picMkLst>
-        </pc:picChg>
       </pc:sldChg>
     </pc:docChg>
   </pc:docChgLst>
@@ -3655,7 +3431,7 @@
             <a:blip>
               <a:extLst>
                 <a:ext uri="{96DAC541-7B7A-43D3-8B79-37D633B846F1}">
-                  <asvg:svgBlip xmlns:asvg="http://schemas.microsoft.com/office/drawing/2016/SVG/main" r:embed="rId6"/>
+                  <asvg:svgBlip xmlns:asvg="http://schemas.microsoft.com/office/drawing/2016/SVG/main" r:embed="rId4"/>
                 </a:ext>
               </a:extLst>
             </a:blip>
@@ -3720,7 +3496,7 @@
             <a:blip>
               <a:extLst>
                 <a:ext uri="{96DAC541-7B7A-43D3-8B79-37D633B846F1}">
-                  <asvg:svgBlip xmlns:asvg="http://schemas.microsoft.com/office/drawing/2016/SVG/main" r:embed="rId6"/>
+                  <asvg:svgBlip xmlns:asvg="http://schemas.microsoft.com/office/drawing/2016/SVG/main" r:embed="rId4"/>
                 </a:ext>
               </a:extLst>
             </a:blip>
@@ -3785,7 +3561,7 @@
             <a:blip>
               <a:extLst>
                 <a:ext uri="{96DAC541-7B7A-43D3-8B79-37D633B846F1}">
-                  <asvg:svgBlip xmlns:asvg="http://schemas.microsoft.com/office/drawing/2016/SVG/main" r:embed="rId6"/>
+                  <asvg:svgBlip xmlns:asvg="http://schemas.microsoft.com/office/drawing/2016/SVG/main" r:embed="rId4"/>
                 </a:ext>
               </a:extLst>
             </a:blip>
@@ -4010,7 +3786,7 @@
         </p:nvSpPr>
         <p:spPr>
           <a:xfrm>
-            <a:off x="854979" y="3645023"/>
+            <a:off x="1990456" y="4373753"/>
             <a:ext cx="1633432" cy="154209"/>
           </a:xfrm>
           <a:prstGeom prst="rect">
@@ -4035,7 +3811,7 @@
                 <a:cs typeface="Arial" panose="020B0604020202020204" pitchFamily="34" charset="0"/>
                 <a:sym typeface="Aileron"/>
               </a:rPr>
-              <a:t>Palak Kotwani</a:t>
+              <a:t>Student Name </a:t>
             </a:r>
           </a:p>
         </p:txBody>
@@ -4054,7 +3830,7 @@
         </p:nvSpPr>
         <p:spPr>
           <a:xfrm>
-            <a:off x="854979" y="3806607"/>
+            <a:off x="1961876" y="4502303"/>
             <a:ext cx="1633432" cy="227435"/>
           </a:xfrm>
           <a:prstGeom prst="rect">
@@ -4102,7 +3878,7 @@
           <p:nvPr/>
         </p:nvPicPr>
         <p:blipFill>
-          <a:blip r:embed="rId7"/>
+          <a:blip r:embed="rId5"/>
           <a:srcRect l="26757" t="2453" r="27842" b="53701"/>
           <a:stretch>
             <a:fillRect/>
@@ -4110,8 +3886,8 @@
         </p:blipFill>
         <p:spPr>
           <a:xfrm>
-            <a:off x="429808" y="3639905"/>
-            <a:ext cx="395331" cy="381795"/>
+            <a:off x="1615694" y="4346948"/>
+            <a:ext cx="346182" cy="334329"/>
           </a:xfrm>
           <a:prstGeom prst="rect">
             <a:avLst/>
@@ -4132,7 +3908,7 @@
         </p:nvSpPr>
         <p:spPr>
           <a:xfrm>
-            <a:off x="3176086" y="3642226"/>
+            <a:off x="3654609" y="4375963"/>
             <a:ext cx="1809978" cy="154209"/>
           </a:xfrm>
           <a:prstGeom prst="rect">
@@ -4176,7 +3952,7 @@
         </p:nvSpPr>
         <p:spPr>
           <a:xfrm>
-            <a:off x="3183460" y="3803810"/>
+            <a:off x="3600118" y="4502302"/>
             <a:ext cx="2272871" cy="227435"/>
           </a:xfrm>
           <a:prstGeom prst="rect">
@@ -4224,7 +4000,7 @@
           <p:nvPr/>
         </p:nvPicPr>
         <p:blipFill>
-          <a:blip r:embed="rId7"/>
+          <a:blip r:embed="rId5"/>
           <a:srcRect l="26859" t="52379" r="26874" b="2349"/>
           <a:stretch>
             <a:fillRect/>
@@ -4232,7 +4008,7 @@
         </p:blipFill>
         <p:spPr>
           <a:xfrm>
-            <a:off x="2747249" y="3631981"/>
+            <a:off x="3171635" y="4301106"/>
             <a:ext cx="398279" cy="389719"/>
           </a:xfrm>
           <a:prstGeom prst="rect">
@@ -4254,10 +4030,10 @@
         </p:nvGrpSpPr>
         <p:grpSpPr>
           <a:xfrm>
-            <a:off x="860459" y="4337076"/>
-            <a:ext cx="2272871" cy="389019"/>
-            <a:chOff x="3139699" y="4295282"/>
-            <a:chExt cx="2272871" cy="389019"/>
+            <a:off x="364882" y="4337076"/>
+            <a:ext cx="2272871" cy="360187"/>
+            <a:chOff x="2644122" y="4295282"/>
+            <a:chExt cx="2272871" cy="360187"/>
           </a:xfrm>
         </p:grpSpPr>
         <p:sp>
@@ -4274,7 +4050,7 @@
           </p:nvSpPr>
           <p:spPr>
             <a:xfrm>
-              <a:off x="3139699" y="4295282"/>
+              <a:off x="2695895" y="4295282"/>
               <a:ext cx="1809978" cy="158890"/>
             </a:xfrm>
             <a:prstGeom prst="rect">
@@ -4318,7 +4094,7 @@
           </p:nvSpPr>
           <p:spPr>
             <a:xfrm>
-              <a:off x="3139699" y="4456866"/>
+              <a:off x="2644122" y="4428034"/>
               <a:ext cx="2272871" cy="227435"/>
             </a:xfrm>
             <a:prstGeom prst="rect">
@@ -4367,7 +4143,7 @@
           <p:nvPr/>
         </p:nvPicPr>
         <p:blipFill>
-          <a:blip r:embed="rId8"/>
+          <a:blip r:embed="rId6"/>
           <a:srcRect l="28109" t="6546" r="28551" b="49509"/>
           <a:stretch>
             <a:fillRect/>
@@ -4375,8 +4151,8 @@
         </p:blipFill>
         <p:spPr>
           <a:xfrm>
-            <a:off x="447718" y="4346948"/>
-            <a:ext cx="375815" cy="381063"/>
+            <a:off x="38435" y="4332547"/>
+            <a:ext cx="329725" cy="334329"/>
           </a:xfrm>
           <a:prstGeom prst="rect">
             <a:avLst/>
@@ -4418,7 +4194,7 @@
             <p:nvPr/>
           </p:nvPicPr>
           <p:blipFill>
-            <a:blip r:embed="rId9"/>
+            <a:blip r:embed="rId7"/>
             <a:stretch>
               <a:fillRect/>
             </a:stretch>
@@ -4448,7 +4224,7 @@
             <p:nvPr/>
           </p:nvPicPr>
           <p:blipFill>
-            <a:blip r:embed="rId10"/>
+            <a:blip r:embed="rId8"/>
             <a:stretch>
               <a:fillRect/>
             </a:stretch>
@@ -4611,7 +4387,7 @@
           <p:nvPr/>
         </p:nvPicPr>
         <p:blipFill>
-          <a:blip r:embed="rId11"/>
+          <a:blip r:embed="rId9"/>
           <a:srcRect b="19729"/>
           <a:stretch>
             <a:fillRect/>
@@ -4627,44 +4403,160 @@
           </a:prstGeom>
         </p:spPr>
       </p:pic>
-      <p:pic>
-        <p:nvPicPr>
-          <p:cNvPr id="26" name="Screen Recording 25">
-            <a:hlinkClick r:id="" action="ppaction://media"/>
+      <p:sp>
+        <p:nvSpPr>
+          <p:cNvPr id="27" name="TextBox 26">
             <a:extLst>
               <a:ext uri="{FF2B5EF4-FFF2-40B4-BE49-F238E27FC236}">
-                <a16:creationId xmlns:a16="http://schemas.microsoft.com/office/drawing/2014/main" id="{BAC847B7-81BA-28A5-EA9A-9A183AF66068}"/>
+                <a16:creationId xmlns:a16="http://schemas.microsoft.com/office/drawing/2014/main" id="{56CE2B4C-42F3-6C3D-A2AC-C0C414252A53}"/>
               </a:ext>
             </a:extLst>
           </p:cNvPr>
-          <p:cNvPicPr>
-            <a:picLocks noChangeAspect="1"/>
-          </p:cNvPicPr>
-          <p:nvPr>
-            <a:videoFile r:link="rId3"/>
-            <p:extLst>
-              <p:ext uri="{DAA4B4D4-6D71-4841-9C94-3DE7FCFB9230}">
-                <p14:media xmlns:p14="http://schemas.microsoft.com/office/powerpoint/2010/main" r:embed="rId2"/>
-              </p:ext>
-            </p:extLst>
-          </p:nvPr>
-        </p:nvPicPr>
-        <p:blipFill>
-          <a:blip r:embed="rId12"/>
-          <a:stretch>
-            <a:fillRect/>
-          </a:stretch>
-        </p:blipFill>
-        <p:spPr>
-          <a:xfrm>
-            <a:off x="4327525" y="2327275"/>
-            <a:ext cx="487363" cy="487363"/>
+          <p:cNvSpPr txBox="1"/>
+          <p:nvPr/>
+        </p:nvSpPr>
+        <p:spPr>
+          <a:xfrm>
+            <a:off x="98623" y="3505955"/>
+            <a:ext cx="5447162" cy="972061"/>
           </a:xfrm>
           <a:prstGeom prst="rect">
             <a:avLst/>
           </a:prstGeom>
-        </p:spPr>
-      </p:pic>
+          <a:noFill/>
+        </p:spPr>
+        <p:txBody>
+          <a:bodyPr wrap="square">
+            <a:spAutoFit/>
+          </a:bodyPr>
+          <a:lstStyle>
+            <a:lvl1pPr marL="0" algn="l" defTabSz="914400" rtl="0" eaLnBrk="1" latinLnBrk="0" hangingPunct="1">
+              <a:defRPr sz="1800" kern="1200">
+                <a:solidFill>
+                  <a:schemeClr val="tx1"/>
+                </a:solidFill>
+                <a:latin typeface="+mn-lt"/>
+                <a:ea typeface="+mn-ea"/>
+                <a:cs typeface="+mn-cs"/>
+              </a:defRPr>
+            </a:lvl1pPr>
+            <a:lvl2pPr marL="457200" algn="l" defTabSz="914400" rtl="0" eaLnBrk="1" latinLnBrk="0" hangingPunct="1">
+              <a:defRPr sz="1800" kern="1200">
+                <a:solidFill>
+                  <a:schemeClr val="tx1"/>
+                </a:solidFill>
+                <a:latin typeface="+mn-lt"/>
+                <a:ea typeface="+mn-ea"/>
+                <a:cs typeface="+mn-cs"/>
+              </a:defRPr>
+            </a:lvl2pPr>
+            <a:lvl3pPr marL="914400" algn="l" defTabSz="914400" rtl="0" eaLnBrk="1" latinLnBrk="0" hangingPunct="1">
+              <a:defRPr sz="1800" kern="1200">
+                <a:solidFill>
+                  <a:schemeClr val="tx1"/>
+                </a:solidFill>
+                <a:latin typeface="+mn-lt"/>
+                <a:ea typeface="+mn-ea"/>
+                <a:cs typeface="+mn-cs"/>
+              </a:defRPr>
+            </a:lvl3pPr>
+            <a:lvl4pPr marL="1371600" algn="l" defTabSz="914400" rtl="0" eaLnBrk="1" latinLnBrk="0" hangingPunct="1">
+              <a:defRPr sz="1800" kern="1200">
+                <a:solidFill>
+                  <a:schemeClr val="tx1"/>
+                </a:solidFill>
+                <a:latin typeface="+mn-lt"/>
+                <a:ea typeface="+mn-ea"/>
+                <a:cs typeface="+mn-cs"/>
+              </a:defRPr>
+            </a:lvl4pPr>
+            <a:lvl5pPr marL="1828800" algn="l" defTabSz="914400" rtl="0" eaLnBrk="1" latinLnBrk="0" hangingPunct="1">
+              <a:defRPr sz="1800" kern="1200">
+                <a:solidFill>
+                  <a:schemeClr val="tx1"/>
+                </a:solidFill>
+                <a:latin typeface="+mn-lt"/>
+                <a:ea typeface="+mn-ea"/>
+                <a:cs typeface="+mn-cs"/>
+              </a:defRPr>
+            </a:lvl5pPr>
+            <a:lvl6pPr marL="2286000" algn="l" defTabSz="914400" rtl="0" eaLnBrk="1" latinLnBrk="0" hangingPunct="1">
+              <a:defRPr sz="1800" kern="1200">
+                <a:solidFill>
+                  <a:schemeClr val="tx1"/>
+                </a:solidFill>
+                <a:latin typeface="+mn-lt"/>
+                <a:ea typeface="+mn-ea"/>
+                <a:cs typeface="+mn-cs"/>
+              </a:defRPr>
+            </a:lvl6pPr>
+            <a:lvl7pPr marL="2743200" algn="l" defTabSz="914400" rtl="0" eaLnBrk="1" latinLnBrk="0" hangingPunct="1">
+              <a:defRPr sz="1800" kern="1200">
+                <a:solidFill>
+                  <a:schemeClr val="tx1"/>
+                </a:solidFill>
+                <a:latin typeface="+mn-lt"/>
+                <a:ea typeface="+mn-ea"/>
+                <a:cs typeface="+mn-cs"/>
+              </a:defRPr>
+            </a:lvl7pPr>
+            <a:lvl8pPr marL="3200400" algn="l" defTabSz="914400" rtl="0" eaLnBrk="1" latinLnBrk="0" hangingPunct="1">
+              <a:defRPr sz="1800" kern="1200">
+                <a:solidFill>
+                  <a:schemeClr val="tx1"/>
+                </a:solidFill>
+                <a:latin typeface="+mn-lt"/>
+                <a:ea typeface="+mn-ea"/>
+                <a:cs typeface="+mn-cs"/>
+              </a:defRPr>
+            </a:lvl8pPr>
+            <a:lvl9pPr marL="3657600" algn="l" defTabSz="914400" rtl="0" eaLnBrk="1" latinLnBrk="0" hangingPunct="1">
+              <a:defRPr sz="1800" kern="1200">
+                <a:solidFill>
+                  <a:schemeClr val="tx1"/>
+                </a:solidFill>
+                <a:latin typeface="+mn-lt"/>
+                <a:ea typeface="+mn-ea"/>
+                <a:cs typeface="+mn-cs"/>
+              </a:defRPr>
+            </a:lvl9pPr>
+          </a:lstStyle>
+          <a:p>
+            <a:pPr algn="ctr">
+              <a:spcBef>
+                <a:spcPts val="400"/>
+              </a:spcBef>
+              <a:spcAft>
+                <a:spcPts val="400"/>
+              </a:spcAft>
+            </a:pPr>
+            <a:r>
+              <a:rPr lang="en-IN" sz="2000" b="1" dirty="0"/>
+              <a:t>AI-Driven Inventory Optimization &amp; Demand-Supply Analysis Using Excel</a:t>
+            </a:r>
+            <a:endParaRPr lang="en-IN" sz="1400" dirty="0">
+              <a:latin typeface="Arial" panose="020B0604020202020204" pitchFamily="34" charset="0"/>
+              <a:ea typeface="Arial" panose="020B0604020202020204" pitchFamily="34" charset="0"/>
+            </a:endParaRPr>
+          </a:p>
+          <a:p>
+            <a:pPr algn="ctr">
+              <a:spcBef>
+                <a:spcPts val="400"/>
+              </a:spcBef>
+              <a:spcAft>
+                <a:spcPts val="400"/>
+              </a:spcAft>
+              <a:buNone/>
+            </a:pPr>
+            <a:endParaRPr lang="en-IN" sz="1050" dirty="0">
+              <a:effectLst/>
+              <a:latin typeface="Arial" panose="020B0604020202020204" pitchFamily="34" charset="0"/>
+              <a:ea typeface="Arial" panose="020B0604020202020204" pitchFamily="34" charset="0"/>
+            </a:endParaRPr>
+          </a:p>
+        </p:txBody>
+      </p:sp>
     </p:spTree>
     <p:custDataLst>
       <p:tags r:id="rId1"/>
@@ -4678,144 +4570,6 @@
   <p:clrMapOvr>
     <a:masterClrMapping/>
   </p:clrMapOvr>
-  <p:timing>
-    <p:tnLst>
-      <p:par>
-        <p:cTn id="1" dur="indefinite" restart="never" nodeType="tmRoot">
-          <p:childTnLst>
-            <p:seq concurrent="1" nextAc="seek">
-              <p:cTn id="2" dur="indefinite" nodeType="mainSeq">
-                <p:childTnLst>
-                  <p:par>
-                    <p:cTn id="3" fill="hold">
-                      <p:stCondLst>
-                        <p:cond delay="indefinite"/>
-                        <p:cond evt="onBegin" delay="0">
-                          <p:tn val="2"/>
-                        </p:cond>
-                      </p:stCondLst>
-                      <p:childTnLst>
-                        <p:par>
-                          <p:cTn id="4" fill="hold">
-                            <p:stCondLst>
-                              <p:cond delay="0"/>
-                            </p:stCondLst>
-                            <p:childTnLst>
-                              <p:par>
-                                <p:cTn id="5" presetID="1" presetClass="mediacall" presetSubtype="0" fill="hold" nodeType="afterEffect">
-                                  <p:stCondLst>
-                                    <p:cond delay="0"/>
-                                  </p:stCondLst>
-                                  <p:childTnLst>
-                                    <p:cmd type="call" cmd="playFrom(0.0)">
-                                      <p:cBhvr>
-                                        <p:cTn id="6" dur="17380" fill="hold"/>
-                                        <p:tgtEl>
-                                          <p:spTgt spid="26"/>
-                                        </p:tgtEl>
-                                      </p:cBhvr>
-                                    </p:cmd>
-                                  </p:childTnLst>
-                                </p:cTn>
-                              </p:par>
-                            </p:childTnLst>
-                          </p:cTn>
-                        </p:par>
-                      </p:childTnLst>
-                    </p:cTn>
-                  </p:par>
-                </p:childTnLst>
-              </p:cTn>
-              <p:prevCondLst>
-                <p:cond evt="onPrev" delay="0">
-                  <p:tgtEl>
-                    <p:sldTgt/>
-                  </p:tgtEl>
-                </p:cond>
-              </p:prevCondLst>
-              <p:nextCondLst>
-                <p:cond evt="onNext" delay="0">
-                  <p:tgtEl>
-                    <p:sldTgt/>
-                  </p:tgtEl>
-                </p:cond>
-              </p:nextCondLst>
-            </p:seq>
-            <p:video>
-              <p:cMediaNode vol="80000">
-                <p:cTn id="7" fill="hold" display="0">
-                  <p:stCondLst>
-                    <p:cond delay="indefinite"/>
-                  </p:stCondLst>
-                </p:cTn>
-                <p:tgtEl>
-                  <p:spTgt spid="26"/>
-                </p:tgtEl>
-              </p:cMediaNode>
-            </p:video>
-            <p:seq concurrent="1" nextAc="seek">
-              <p:cTn id="8" restart="whenNotActive" fill="hold" evtFilter="cancelBubble" nodeType="interactiveSeq">
-                <p:stCondLst>
-                  <p:cond evt="onClick" delay="0">
-                    <p:tgtEl>
-                      <p:spTgt spid="26"/>
-                    </p:tgtEl>
-                  </p:cond>
-                </p:stCondLst>
-                <p:endSync evt="end" delay="0">
-                  <p:rtn val="all"/>
-                </p:endSync>
-                <p:childTnLst>
-                  <p:par>
-                    <p:cTn id="9" fill="hold">
-                      <p:stCondLst>
-                        <p:cond delay="0"/>
-                      </p:stCondLst>
-                      <p:childTnLst>
-                        <p:par>
-                          <p:cTn id="10" fill="hold">
-                            <p:stCondLst>
-                              <p:cond delay="0"/>
-                            </p:stCondLst>
-                            <p:childTnLst>
-                              <p:par>
-                                <p:cTn id="11" presetID="2" presetClass="mediacall" presetSubtype="0" fill="hold" nodeType="clickEffect">
-                                  <p:stCondLst>
-                                    <p:cond delay="0"/>
-                                  </p:stCondLst>
-                                  <p:childTnLst>
-                                    <p:cmd type="call" cmd="togglePause">
-                                      <p:cBhvr>
-                                        <p:cTn id="12" dur="1" fill="hold"/>
-                                        <p:tgtEl>
-                                          <p:spTgt spid="26"/>
-                                        </p:tgtEl>
-                                      </p:cBhvr>
-                                    </p:cmd>
-                                  </p:childTnLst>
-                                </p:cTn>
-                              </p:par>
-                            </p:childTnLst>
-                          </p:cTn>
-                        </p:par>
-                      </p:childTnLst>
-                    </p:cTn>
-                  </p:par>
-                </p:childTnLst>
-              </p:cTn>
-              <p:nextCondLst>
-                <p:cond evt="onClick" delay="0">
-                  <p:tgtEl>
-                    <p:spTgt spid="26"/>
-                  </p:tgtEl>
-                </p:cond>
-              </p:nextCondLst>
-            </p:seq>
-          </p:childTnLst>
-        </p:cTn>
-      </p:par>
-    </p:tnLst>
-  </p:timing>
 </p:sld>
 </file>
 
